--- a/docs/pitch/Numetrix_投资人介绍.pptx
+++ b/docs/pitch/Numetrix_投资人介绍.pptx
@@ -3353,7 +3353,7 @@
                 <a:ea typeface="Microsoft YaHei"/>
                 <a:cs typeface="Microsoft YaHei"/>
               </a:rPr>
-              <a:t>Numetrix</a:t>
+              <a:t>RLab Cortex</a:t>
             </a:r>
           </a:p>
         </p:txBody>
@@ -4347,7 +4347,7 @@
                 <a:ea typeface="Microsoft YaHei"/>
                 <a:cs typeface="Microsoft YaHei"/>
               </a:rPr>
-              <a:t>Numetrix · 可验证数据分析 Agent</a:t>
+              <a:t>RLab Cortex · 可验证数据分析 Agent</a:t>
             </a:r>
           </a:p>
         </p:txBody>
@@ -5115,7 +5115,7 @@
                 <a:ea typeface="Microsoft YaHei"/>
                 <a:cs typeface="Microsoft YaHei"/>
               </a:rPr>
-              <a:t>Numetrix · 可验证数据分析 Agent</a:t>
+              <a:t>RLab Cortex · 可验证数据分析 Agent</a:t>
             </a:r>
           </a:p>
         </p:txBody>
@@ -5883,7 +5883,7 @@
                 <a:ea typeface="Microsoft YaHei"/>
                 <a:cs typeface="Microsoft YaHei"/>
               </a:rPr>
-              <a:t>Numetrix · 可验证数据分析 Agent</a:t>
+              <a:t>RLab Cortex · 可验证数据分析 Agent</a:t>
             </a:r>
           </a:p>
         </p:txBody>
@@ -6813,7 +6813,7 @@
                 <a:ea typeface="Microsoft YaHei"/>
                 <a:cs typeface="Microsoft YaHei"/>
               </a:rPr>
-              <a:t>Numetrix · 可验证数据分析 Agent</a:t>
+              <a:t>RLab Cortex · 可验证数据分析 Agent</a:t>
             </a:r>
           </a:p>
         </p:txBody>
@@ -7196,7 +7196,7 @@
                 <a:ea typeface="Microsoft YaHei"/>
                 <a:cs typeface="Microsoft YaHei"/>
               </a:rPr>
-              <a:t>Numetrix</a:t>
+              <a:t>RLab Cortex</a:t>
             </a:r>
           </a:p>
         </p:txBody>
@@ -9090,7 +9090,7 @@
                 <a:ea typeface="Microsoft YaHei"/>
                 <a:cs typeface="Microsoft YaHei"/>
               </a:rPr>
-              <a:t>Numetrix · 可验证数据分析 Agent</a:t>
+              <a:t>RLab Cortex · 可验证数据分析 Agent</a:t>
             </a:r>
           </a:p>
         </p:txBody>
@@ -9890,7 +9890,7 @@
                 <a:ea typeface="Microsoft YaHei"/>
                 <a:cs typeface="Microsoft YaHei"/>
               </a:rPr>
-              <a:t>同时做到「深」与「可信」，且把它产品化成 Agent —— 这就是 Numetrix。</a:t>
+              <a:t>同时做到「深」与「可信」，且把它产品化成 Agent —— 这就是 RLab Cortex。</a:t>
             </a:r>
           </a:p>
         </p:txBody>
@@ -9971,7 +9971,7 @@
                 <a:ea typeface="Microsoft YaHei"/>
                 <a:cs typeface="Microsoft YaHei"/>
               </a:rPr>
-              <a:t>Numetrix · 可验证数据分析 Agent</a:t>
+              <a:t>RLab Cortex · 可验证数据分析 Agent</a:t>
             </a:r>
           </a:p>
         </p:txBody>
@@ -11225,7 +11225,7 @@
                 <a:ea typeface="Microsoft YaHei"/>
                 <a:cs typeface="Microsoft YaHei"/>
               </a:rPr>
-              <a:t>Numetrix · 可验证数据分析 Agent</a:t>
+              <a:t>RLab Cortex · 可验证数据分析 Agent</a:t>
             </a:r>
           </a:p>
         </p:txBody>
@@ -12535,7 +12535,7 @@
                 <a:ea typeface="Microsoft YaHei"/>
                 <a:cs typeface="Microsoft YaHei"/>
               </a:rPr>
-              <a:t>Numetrix · 可验证数据分析 Agent</a:t>
+              <a:t>RLab Cortex · 可验证数据分析 Agent</a:t>
             </a:r>
           </a:p>
         </p:txBody>
@@ -13577,7 +13577,7 @@
                 <a:ea typeface="Microsoft YaHei"/>
                 <a:cs typeface="Microsoft YaHei"/>
               </a:rPr>
-              <a:t>Numetrix · 可验证数据分析 Agent</a:t>
+              <a:t>RLab Cortex · 可验证数据分析 Agent</a:t>
             </a:r>
           </a:p>
         </p:txBody>
@@ -15032,7 +15032,7 @@
                 <a:ea typeface="Microsoft YaHei"/>
                 <a:cs typeface="Microsoft YaHei"/>
               </a:rPr>
-              <a:t>Numetrix · 可验证数据分析 Agent</a:t>
+              <a:t>RLab Cortex · 可验证数据分析 Agent</a:t>
             </a:r>
           </a:p>
         </p:txBody>
@@ -15209,7 +15209,7 @@
                 <a:ea typeface="Microsoft YaHei"/>
                 <a:cs typeface="Microsoft YaHei"/>
               </a:rPr>
-              <a:t>别的工具让你「赌」数字对不对，Numetrix 让你能「证明」它对</a:t>
+              <a:t>别的工具让你「赌」数字对不对，RLab Cortex 让你能「证明」它对</a:t>
             </a:r>
           </a:p>
         </p:txBody>
@@ -15416,7 +15416,7 @@
                 <a:ea typeface="Microsoft YaHei"/>
                 <a:cs typeface="Microsoft YaHei"/>
               </a:rPr>
-              <a:t>Numetrix</a:t>
+              <a:t>RLab Cortex</a:t>
             </a:r>
           </a:p>
         </p:txBody>
@@ -15663,7 +15663,7 @@
                 <a:ea typeface="Microsoft YaHei"/>
                 <a:cs typeface="Microsoft YaHei"/>
               </a:rPr>
-              <a:t>Numetrix · 可验证数据分析 Agent</a:t>
+              <a:t>RLab Cortex · 可验证数据分析 Agent</a:t>
             </a:r>
           </a:p>
         </p:txBody>
@@ -16759,7 +16759,7 @@
                 <a:ea typeface="Microsoft YaHei"/>
                 <a:cs typeface="Microsoft YaHei"/>
               </a:rPr>
-              <a:t>Numetrix · 可验证数据分析 Agent</a:t>
+              <a:t>RLab Cortex · 可验证数据分析 Agent</a:t>
             </a:r>
           </a:p>
         </p:txBody>
@@ -17996,7 +17996,7 @@
                 <a:ea typeface="Microsoft YaHei"/>
                 <a:cs typeface="Microsoft YaHei"/>
               </a:rPr>
-              <a:t>Numetrix · 可验证数据分析 Agent</a:t>
+              <a:t>RLab Cortex · 可验证数据分析 Agent</a:t>
             </a:r>
           </a:p>
         </p:txBody>
@@ -18952,7 +18952,7 @@
                 <a:ea typeface="Microsoft YaHei"/>
                 <a:cs typeface="Microsoft YaHei"/>
               </a:rPr>
-              <a:t>Numetrix · 可验证数据分析 Agent</a:t>
+              <a:t>RLab Cortex · 可验证数据分析 Agent</a:t>
             </a:r>
           </a:p>
         </p:txBody>
@@ -19951,7 +19951,7 @@
                 <a:ea typeface="Microsoft YaHei"/>
                 <a:cs typeface="Microsoft YaHei"/>
               </a:rPr>
-              <a:t>Numetrix · 可验证数据分析 Agent</a:t>
+              <a:t>RLab Cortex · 可验证数据分析 Agent</a:t>
             </a:r>
           </a:p>
         </p:txBody>
@@ -20640,7 +20640,7 @@
                 <a:ea typeface="Microsoft YaHei"/>
                 <a:cs typeface="Microsoft YaHei"/>
               </a:rPr>
-              <a:t>Numetrix · 可验证数据分析 Agent</a:t>
+              <a:t>RLab Cortex · 可验证数据分析 Agent</a:t>
             </a:r>
           </a:p>
         </p:txBody>
@@ -22101,7 +22101,7 @@
                 <a:ea typeface="Microsoft YaHei"/>
                 <a:cs typeface="Microsoft YaHei"/>
               </a:rPr>
-              <a:t>Numetrix · 可验证数据分析 Agent</a:t>
+              <a:t>RLab Cortex · 可验证数据分析 Agent</a:t>
             </a:r>
           </a:p>
         </p:txBody>
@@ -22869,7 +22869,7 @@
                 <a:ea typeface="Microsoft YaHei"/>
                 <a:cs typeface="Microsoft YaHei"/>
               </a:rPr>
-              <a:t>Numetrix · 可验证数据分析 Agent</a:t>
+              <a:t>RLab Cortex · 可验证数据分析 Agent</a:t>
             </a:r>
           </a:p>
         </p:txBody>
@@ -23637,7 +23637,7 @@
                 <a:ea typeface="Microsoft YaHei"/>
                 <a:cs typeface="Microsoft YaHei"/>
               </a:rPr>
-              <a:t>Numetrix · 可验证数据分析 Agent</a:t>
+              <a:t>RLab Cortex · 可验证数据分析 Agent</a:t>
             </a:r>
           </a:p>
         </p:txBody>
@@ -24405,7 +24405,7 @@
                 <a:ea typeface="Microsoft YaHei"/>
                 <a:cs typeface="Microsoft YaHei"/>
               </a:rPr>
-              <a:t>Numetrix · 可验证数据分析 Agent</a:t>
+              <a:t>RLab Cortex · 可验证数据分析 Agent</a:t>
             </a:r>
           </a:p>
         </p:txBody>
